--- a/ENR System Development.pptx
+++ b/ENR System Development.pptx
@@ -5843,7 +5843,7 @@
         <p:spPr>
           <a:xfrm>
             <a:off x="3768213" y="4157577"/>
-            <a:ext cx="4613787" cy="584775"/>
+            <a:ext cx="5375787" cy="584775"/>
           </a:xfrm>
           <a:prstGeom prst="rect">
             <a:avLst/>
@@ -5862,7 +5862,7 @@
                 <a:sym typeface="Kollektif Bold"/>
                 <a:hlinkClick r:id="rId9"/>
               </a:rPr>
-              <a:t>Click on me (ctrl + click)</a:t>
+              <a:t>Click on me -&gt; (ctrl + click)</a:t>
             </a:r>
             <a:endParaRPr lang="en-US" sz="3200" dirty="0"/>
           </a:p>
@@ -6602,7 +6602,7 @@
         <p:spPr>
           <a:xfrm>
             <a:off x="3768213" y="4309977"/>
-            <a:ext cx="4613787" cy="584775"/>
+            <a:ext cx="5147187" cy="584775"/>
           </a:xfrm>
           <a:prstGeom prst="rect">
             <a:avLst/>
@@ -6621,7 +6621,7 @@
                 <a:sym typeface="Kollektif Bold"/>
                 <a:hlinkClick r:id="rId9"/>
               </a:rPr>
-              <a:t>Click on me (ctrl + click)</a:t>
+              <a:t>Click on me -&gt; (ctrl + click)</a:t>
             </a:r>
             <a:endParaRPr lang="en-US" sz="3200" dirty="0"/>
           </a:p>
@@ -7361,7 +7361,7 @@
         <p:spPr>
           <a:xfrm>
             <a:off x="3768213" y="4233777"/>
-            <a:ext cx="4613787" cy="584775"/>
+            <a:ext cx="5375787" cy="584775"/>
           </a:xfrm>
           <a:prstGeom prst="rect">
             <a:avLst/>
@@ -7380,7 +7380,7 @@
                 <a:sym typeface="Kollektif Bold"/>
                 <a:hlinkClick r:id="rId9"/>
               </a:rPr>
-              <a:t>Click on me (ctrl + click)</a:t>
+              <a:t>Click on me -&gt; (ctrl + click)</a:t>
             </a:r>
             <a:endParaRPr lang="en-US" sz="3200" dirty="0"/>
           </a:p>
@@ -8120,7 +8120,7 @@
         <p:spPr>
           <a:xfrm>
             <a:off x="3768213" y="4203073"/>
-            <a:ext cx="4613787" cy="584775"/>
+            <a:ext cx="5223387" cy="584775"/>
           </a:xfrm>
           <a:prstGeom prst="rect">
             <a:avLst/>
@@ -8139,7 +8139,7 @@
                 <a:sym typeface="Kollektif Bold"/>
                 <a:hlinkClick r:id="rId9"/>
               </a:rPr>
-              <a:t>Click on me (ctrl + click)</a:t>
+              <a:t>Click on me -&gt; (ctrl + click)</a:t>
             </a:r>
             <a:endParaRPr lang="en-US" sz="3200" dirty="0"/>
           </a:p>
@@ -8879,7 +8879,7 @@
         <p:spPr>
           <a:xfrm>
             <a:off x="3768213" y="4203073"/>
-            <a:ext cx="4613787" cy="584775"/>
+            <a:ext cx="5147187" cy="584775"/>
           </a:xfrm>
           <a:prstGeom prst="rect">
             <a:avLst/>
@@ -8898,7 +8898,7 @@
                 <a:sym typeface="Kollektif Bold"/>
                 <a:hlinkClick r:id="rId9"/>
               </a:rPr>
-              <a:t>Click on me (ctrl + click)</a:t>
+              <a:t>Click on me -&gt; (ctrl + click)</a:t>
             </a:r>
             <a:endParaRPr lang="en-US" sz="3200" dirty="0"/>
           </a:p>
@@ -9638,7 +9638,7 @@
         <p:spPr>
           <a:xfrm>
             <a:off x="3768213" y="4203073"/>
-            <a:ext cx="4613787" cy="584775"/>
+            <a:ext cx="5147187" cy="584775"/>
           </a:xfrm>
           <a:prstGeom prst="rect">
             <a:avLst/>
@@ -9657,7 +9657,7 @@
                 <a:sym typeface="Kollektif Bold"/>
                 <a:hlinkClick r:id="rId9"/>
               </a:rPr>
-              <a:t>Click on me (ctrl + click)</a:t>
+              <a:t>Click on me -&gt; (ctrl + click)</a:t>
             </a:r>
             <a:endParaRPr lang="en-US" sz="3200" dirty="0"/>
           </a:p>
@@ -10440,7 +10440,7 @@
         <p:spPr>
           <a:xfrm>
             <a:off x="3768213" y="4203073"/>
-            <a:ext cx="4613787" cy="584775"/>
+            <a:ext cx="5223387" cy="584775"/>
           </a:xfrm>
           <a:prstGeom prst="rect">
             <a:avLst/>
@@ -10459,7 +10459,7 @@
                 <a:sym typeface="Kollektif Bold"/>
                 <a:hlinkClick r:id="rId9"/>
               </a:rPr>
-              <a:t>Click on me (ctrl + click)</a:t>
+              <a:t>Click on me -&gt; (ctrl + click)</a:t>
             </a:r>
             <a:endParaRPr lang="en-US" sz="3200" dirty="0"/>
           </a:p>
@@ -10627,7 +10627,7 @@
         <p:spPr>
           <a:xfrm>
             <a:off x="3768213" y="6887842"/>
-            <a:ext cx="4613787" cy="584775"/>
+            <a:ext cx="5528187" cy="584775"/>
           </a:xfrm>
           <a:prstGeom prst="rect">
             <a:avLst/>
@@ -10646,7 +10646,7 @@
                 <a:sym typeface="Kollektif Bold"/>
                 <a:hlinkClick r:id="rId12"/>
               </a:rPr>
-              <a:t>Click on me (ctrl + click)</a:t>
+              <a:t>Click on me -&gt; (ctrl + click)</a:t>
             </a:r>
             <a:endParaRPr lang="en-US" sz="3200" dirty="0"/>
           </a:p>
@@ -16970,7 +16970,308 @@
       </p:sp>
       <p:sp>
         <p:nvSpPr>
-          <p:cNvPr id="10" name="TextBox 10"/>
+          <p:cNvPr id="11" name="Freeform 11"/>
+          <p:cNvSpPr/>
+          <p:nvPr/>
+        </p:nvSpPr>
+        <p:spPr>
+          <a:xfrm rot="-10800000">
+            <a:off x="16192287" y="7062107"/>
+            <a:ext cx="1083809" cy="1083809"/>
+          </a:xfrm>
+          <a:custGeom>
+            <a:avLst/>
+            <a:gdLst/>
+            <a:ahLst/>
+            <a:cxnLst/>
+            <a:rect l="l" t="t" r="r" b="b"/>
+            <a:pathLst>
+              <a:path w="1083809" h="1083809">
+                <a:moveTo>
+                  <a:pt x="0" y="0"/>
+                </a:moveTo>
+                <a:lnTo>
+                  <a:pt x="1083809" y="0"/>
+                </a:lnTo>
+                <a:lnTo>
+                  <a:pt x="1083809" y="1083809"/>
+                </a:lnTo>
+                <a:lnTo>
+                  <a:pt x="0" y="1083809"/>
+                </a:lnTo>
+                <a:lnTo>
+                  <a:pt x="0" y="0"/>
+                </a:lnTo>
+                <a:close/>
+              </a:path>
+            </a:pathLst>
+          </a:custGeom>
+          <a:blipFill>
+            <a:blip r:embed="rId2">
+              <a:extLst>
+                <a:ext uri="{96DAC541-7B7A-43D3-8B79-37D633B846F1}">
+                  <asvg:svgBlip xmlns:asvg="http://schemas.microsoft.com/office/drawing/2016/SVG/main" r:embed="rId3"/>
+                </a:ext>
+              </a:extLst>
+            </a:blip>
+            <a:stretch>
+              <a:fillRect/>
+            </a:stretch>
+          </a:blipFill>
+        </p:spPr>
+        <p:txBody>
+          <a:bodyPr/>
+          <a:lstStyle/>
+          <a:p>
+            <a:endParaRPr lang="en-US"/>
+          </a:p>
+        </p:txBody>
+      </p:sp>
+      <p:sp>
+        <p:nvSpPr>
+          <p:cNvPr id="12" name="Freeform 12"/>
+          <p:cNvSpPr/>
+          <p:nvPr/>
+        </p:nvSpPr>
+        <p:spPr>
+          <a:xfrm>
+            <a:off x="17266571" y="7090682"/>
+            <a:ext cx="1083809" cy="1083809"/>
+          </a:xfrm>
+          <a:custGeom>
+            <a:avLst/>
+            <a:gdLst/>
+            <a:ahLst/>
+            <a:cxnLst/>
+            <a:rect l="l" t="t" r="r" b="b"/>
+            <a:pathLst>
+              <a:path w="1083809" h="1083809">
+                <a:moveTo>
+                  <a:pt x="0" y="0"/>
+                </a:moveTo>
+                <a:lnTo>
+                  <a:pt x="1083809" y="0"/>
+                </a:lnTo>
+                <a:lnTo>
+                  <a:pt x="1083809" y="1083809"/>
+                </a:lnTo>
+                <a:lnTo>
+                  <a:pt x="0" y="1083809"/>
+                </a:lnTo>
+                <a:lnTo>
+                  <a:pt x="0" y="0"/>
+                </a:lnTo>
+                <a:close/>
+              </a:path>
+            </a:pathLst>
+          </a:custGeom>
+          <a:blipFill>
+            <a:blip r:embed="rId4">
+              <a:extLst>
+                <a:ext uri="{96DAC541-7B7A-43D3-8B79-37D633B846F1}">
+                  <asvg:svgBlip xmlns:asvg="http://schemas.microsoft.com/office/drawing/2016/SVG/main" r:embed="rId5"/>
+                </a:ext>
+              </a:extLst>
+            </a:blip>
+            <a:stretch>
+              <a:fillRect/>
+            </a:stretch>
+          </a:blipFill>
+        </p:spPr>
+        <p:txBody>
+          <a:bodyPr/>
+          <a:lstStyle/>
+          <a:p>
+            <a:endParaRPr lang="en-US"/>
+          </a:p>
+        </p:txBody>
+      </p:sp>
+      <p:sp>
+        <p:nvSpPr>
+          <p:cNvPr id="13" name="Freeform 13"/>
+          <p:cNvSpPr/>
+          <p:nvPr/>
+        </p:nvSpPr>
+        <p:spPr>
+          <a:xfrm>
+            <a:off x="16182762" y="8174491"/>
+            <a:ext cx="1083809" cy="1083809"/>
+          </a:xfrm>
+          <a:custGeom>
+            <a:avLst/>
+            <a:gdLst/>
+            <a:ahLst/>
+            <a:cxnLst/>
+            <a:rect l="l" t="t" r="r" b="b"/>
+            <a:pathLst>
+              <a:path w="1083809" h="1083809">
+                <a:moveTo>
+                  <a:pt x="0" y="0"/>
+                </a:moveTo>
+                <a:lnTo>
+                  <a:pt x="1083809" y="0"/>
+                </a:lnTo>
+                <a:lnTo>
+                  <a:pt x="1083809" y="1083809"/>
+                </a:lnTo>
+                <a:lnTo>
+                  <a:pt x="0" y="1083809"/>
+                </a:lnTo>
+                <a:lnTo>
+                  <a:pt x="0" y="0"/>
+                </a:lnTo>
+                <a:close/>
+              </a:path>
+            </a:pathLst>
+          </a:custGeom>
+          <a:blipFill>
+            <a:blip r:embed="rId2">
+              <a:extLst>
+                <a:ext uri="{96DAC541-7B7A-43D3-8B79-37D633B846F1}">
+                  <asvg:svgBlip xmlns:asvg="http://schemas.microsoft.com/office/drawing/2016/SVG/main" r:embed="rId3"/>
+                </a:ext>
+              </a:extLst>
+            </a:blip>
+            <a:stretch>
+              <a:fillRect/>
+            </a:stretch>
+          </a:blipFill>
+        </p:spPr>
+        <p:txBody>
+          <a:bodyPr/>
+          <a:lstStyle/>
+          <a:p>
+            <a:endParaRPr lang="en-US"/>
+          </a:p>
+        </p:txBody>
+      </p:sp>
+      <p:sp>
+        <p:nvSpPr>
+          <p:cNvPr id="14" name="Freeform 14"/>
+          <p:cNvSpPr/>
+          <p:nvPr/>
+        </p:nvSpPr>
+        <p:spPr>
+          <a:xfrm rot="-10800000">
+            <a:off x="16182762" y="9258300"/>
+            <a:ext cx="1083809" cy="1083809"/>
+          </a:xfrm>
+          <a:custGeom>
+            <a:avLst/>
+            <a:gdLst/>
+            <a:ahLst/>
+            <a:cxnLst/>
+            <a:rect l="l" t="t" r="r" b="b"/>
+            <a:pathLst>
+              <a:path w="1083809" h="1083809">
+                <a:moveTo>
+                  <a:pt x="0" y="0"/>
+                </a:moveTo>
+                <a:lnTo>
+                  <a:pt x="1083809" y="0"/>
+                </a:lnTo>
+                <a:lnTo>
+                  <a:pt x="1083809" y="1083809"/>
+                </a:lnTo>
+                <a:lnTo>
+                  <a:pt x="0" y="1083809"/>
+                </a:lnTo>
+                <a:lnTo>
+                  <a:pt x="0" y="0"/>
+                </a:lnTo>
+                <a:close/>
+              </a:path>
+            </a:pathLst>
+          </a:custGeom>
+          <a:blipFill>
+            <a:blip r:embed="rId4">
+              <a:extLst>
+                <a:ext uri="{96DAC541-7B7A-43D3-8B79-37D633B846F1}">
+                  <asvg:svgBlip xmlns:asvg="http://schemas.microsoft.com/office/drawing/2016/SVG/main" r:embed="rId5"/>
+                </a:ext>
+              </a:extLst>
+            </a:blip>
+            <a:stretch>
+              <a:fillRect/>
+            </a:stretch>
+          </a:blipFill>
+        </p:spPr>
+        <p:txBody>
+          <a:bodyPr/>
+          <a:lstStyle/>
+          <a:p>
+            <a:endParaRPr lang="en-US"/>
+          </a:p>
+        </p:txBody>
+      </p:sp>
+      <p:sp>
+        <p:nvSpPr>
+          <p:cNvPr id="15" name="Freeform 15"/>
+          <p:cNvSpPr/>
+          <p:nvPr/>
+        </p:nvSpPr>
+        <p:spPr>
+          <a:xfrm rot="-5400000">
+            <a:off x="17266571" y="9258300"/>
+            <a:ext cx="1083809" cy="1083809"/>
+          </a:xfrm>
+          <a:custGeom>
+            <a:avLst/>
+            <a:gdLst/>
+            <a:ahLst/>
+            <a:cxnLst/>
+            <a:rect l="l" t="t" r="r" b="b"/>
+            <a:pathLst>
+              <a:path w="1083809" h="1083809">
+                <a:moveTo>
+                  <a:pt x="0" y="0"/>
+                </a:moveTo>
+                <a:lnTo>
+                  <a:pt x="1083809" y="0"/>
+                </a:lnTo>
+                <a:lnTo>
+                  <a:pt x="1083809" y="1083809"/>
+                </a:lnTo>
+                <a:lnTo>
+                  <a:pt x="0" y="1083809"/>
+                </a:lnTo>
+                <a:lnTo>
+                  <a:pt x="0" y="0"/>
+                </a:lnTo>
+                <a:close/>
+              </a:path>
+            </a:pathLst>
+          </a:custGeom>
+          <a:blipFill>
+            <a:blip r:embed="rId6">
+              <a:extLst>
+                <a:ext uri="{96DAC541-7B7A-43D3-8B79-37D633B846F1}">
+                  <asvg:svgBlip xmlns:asvg="http://schemas.microsoft.com/office/drawing/2016/SVG/main" r:embed="rId7"/>
+                </a:ext>
+              </a:extLst>
+            </a:blip>
+            <a:stretch>
+              <a:fillRect/>
+            </a:stretch>
+          </a:blipFill>
+        </p:spPr>
+        <p:txBody>
+          <a:bodyPr/>
+          <a:lstStyle/>
+          <a:p>
+            <a:endParaRPr lang="en-US"/>
+          </a:p>
+        </p:txBody>
+      </p:sp>
+      <p:sp>
+        <p:nvSpPr>
+          <p:cNvPr id="16" name="TextBox 10">
+            <a:extLst>
+              <a:ext uri="{FF2B5EF4-FFF2-40B4-BE49-F238E27FC236}">
+                <a16:creationId xmlns:a16="http://schemas.microsoft.com/office/drawing/2014/main" id="{B5F11F80-69CD-51F3-CC94-A7BA00F790F8}"/>
+              </a:ext>
+            </a:extLst>
+          </p:cNvPr>
           <p:cNvSpPr txBox="1"/>
           <p:nvPr/>
         </p:nvSpPr>
@@ -17011,305 +17312,10 @@
       </p:sp>
       <p:sp>
         <p:nvSpPr>
-          <p:cNvPr id="11" name="Freeform 11"/>
-          <p:cNvSpPr/>
-          <p:nvPr/>
-        </p:nvSpPr>
-        <p:spPr>
-          <a:xfrm rot="-10800000">
-            <a:off x="16192287" y="7062107"/>
-            <a:ext cx="1083809" cy="1083809"/>
-          </a:xfrm>
-          <a:custGeom>
-            <a:avLst/>
-            <a:gdLst/>
-            <a:ahLst/>
-            <a:cxnLst/>
-            <a:rect l="l" t="t" r="r" b="b"/>
-            <a:pathLst>
-              <a:path w="1083809" h="1083809">
-                <a:moveTo>
-                  <a:pt x="0" y="0"/>
-                </a:moveTo>
-                <a:lnTo>
-                  <a:pt x="1083809" y="0"/>
-                </a:lnTo>
-                <a:lnTo>
-                  <a:pt x="1083809" y="1083809"/>
-                </a:lnTo>
-                <a:lnTo>
-                  <a:pt x="0" y="1083809"/>
-                </a:lnTo>
-                <a:lnTo>
-                  <a:pt x="0" y="0"/>
-                </a:lnTo>
-                <a:close/>
-              </a:path>
-            </a:pathLst>
-          </a:custGeom>
-          <a:blipFill>
-            <a:blip r:embed="rId2">
-              <a:extLst>
-                <a:ext uri="{96DAC541-7B7A-43D3-8B79-37D633B846F1}">
-                  <asvg:svgBlip xmlns:asvg="http://schemas.microsoft.com/office/drawing/2016/SVG/main" r:embed="rId3"/>
-                </a:ext>
-              </a:extLst>
-            </a:blip>
-            <a:stretch>
-              <a:fillRect/>
-            </a:stretch>
-          </a:blipFill>
-        </p:spPr>
-        <p:txBody>
-          <a:bodyPr/>
-          <a:lstStyle/>
-          <a:p>
-            <a:endParaRPr lang="en-US"/>
-          </a:p>
-        </p:txBody>
-      </p:sp>
-      <p:sp>
-        <p:nvSpPr>
-          <p:cNvPr id="12" name="Freeform 12"/>
-          <p:cNvSpPr/>
-          <p:nvPr/>
-        </p:nvSpPr>
-        <p:spPr>
-          <a:xfrm>
-            <a:off x="17266571" y="7090682"/>
-            <a:ext cx="1083809" cy="1083809"/>
-          </a:xfrm>
-          <a:custGeom>
-            <a:avLst/>
-            <a:gdLst/>
-            <a:ahLst/>
-            <a:cxnLst/>
-            <a:rect l="l" t="t" r="r" b="b"/>
-            <a:pathLst>
-              <a:path w="1083809" h="1083809">
-                <a:moveTo>
-                  <a:pt x="0" y="0"/>
-                </a:moveTo>
-                <a:lnTo>
-                  <a:pt x="1083809" y="0"/>
-                </a:lnTo>
-                <a:lnTo>
-                  <a:pt x="1083809" y="1083809"/>
-                </a:lnTo>
-                <a:lnTo>
-                  <a:pt x="0" y="1083809"/>
-                </a:lnTo>
-                <a:lnTo>
-                  <a:pt x="0" y="0"/>
-                </a:lnTo>
-                <a:close/>
-              </a:path>
-            </a:pathLst>
-          </a:custGeom>
-          <a:blipFill>
-            <a:blip r:embed="rId4">
-              <a:extLst>
-                <a:ext uri="{96DAC541-7B7A-43D3-8B79-37D633B846F1}">
-                  <asvg:svgBlip xmlns:asvg="http://schemas.microsoft.com/office/drawing/2016/SVG/main" r:embed="rId5"/>
-                </a:ext>
-              </a:extLst>
-            </a:blip>
-            <a:stretch>
-              <a:fillRect/>
-            </a:stretch>
-          </a:blipFill>
-        </p:spPr>
-        <p:txBody>
-          <a:bodyPr/>
-          <a:lstStyle/>
-          <a:p>
-            <a:endParaRPr lang="en-US"/>
-          </a:p>
-        </p:txBody>
-      </p:sp>
-      <p:sp>
-        <p:nvSpPr>
-          <p:cNvPr id="13" name="Freeform 13"/>
-          <p:cNvSpPr/>
-          <p:nvPr/>
-        </p:nvSpPr>
-        <p:spPr>
-          <a:xfrm>
-            <a:off x="16182762" y="8174491"/>
-            <a:ext cx="1083809" cy="1083809"/>
-          </a:xfrm>
-          <a:custGeom>
-            <a:avLst/>
-            <a:gdLst/>
-            <a:ahLst/>
-            <a:cxnLst/>
-            <a:rect l="l" t="t" r="r" b="b"/>
-            <a:pathLst>
-              <a:path w="1083809" h="1083809">
-                <a:moveTo>
-                  <a:pt x="0" y="0"/>
-                </a:moveTo>
-                <a:lnTo>
-                  <a:pt x="1083809" y="0"/>
-                </a:lnTo>
-                <a:lnTo>
-                  <a:pt x="1083809" y="1083809"/>
-                </a:lnTo>
-                <a:lnTo>
-                  <a:pt x="0" y="1083809"/>
-                </a:lnTo>
-                <a:lnTo>
-                  <a:pt x="0" y="0"/>
-                </a:lnTo>
-                <a:close/>
-              </a:path>
-            </a:pathLst>
-          </a:custGeom>
-          <a:blipFill>
-            <a:blip r:embed="rId2">
-              <a:extLst>
-                <a:ext uri="{96DAC541-7B7A-43D3-8B79-37D633B846F1}">
-                  <asvg:svgBlip xmlns:asvg="http://schemas.microsoft.com/office/drawing/2016/SVG/main" r:embed="rId3"/>
-                </a:ext>
-              </a:extLst>
-            </a:blip>
-            <a:stretch>
-              <a:fillRect/>
-            </a:stretch>
-          </a:blipFill>
-        </p:spPr>
-        <p:txBody>
-          <a:bodyPr/>
-          <a:lstStyle/>
-          <a:p>
-            <a:endParaRPr lang="en-US"/>
-          </a:p>
-        </p:txBody>
-      </p:sp>
-      <p:sp>
-        <p:nvSpPr>
-          <p:cNvPr id="14" name="Freeform 14"/>
-          <p:cNvSpPr/>
-          <p:nvPr/>
-        </p:nvSpPr>
-        <p:spPr>
-          <a:xfrm rot="-10800000">
-            <a:off x="16182762" y="9258300"/>
-            <a:ext cx="1083809" cy="1083809"/>
-          </a:xfrm>
-          <a:custGeom>
-            <a:avLst/>
-            <a:gdLst/>
-            <a:ahLst/>
-            <a:cxnLst/>
-            <a:rect l="l" t="t" r="r" b="b"/>
-            <a:pathLst>
-              <a:path w="1083809" h="1083809">
-                <a:moveTo>
-                  <a:pt x="0" y="0"/>
-                </a:moveTo>
-                <a:lnTo>
-                  <a:pt x="1083809" y="0"/>
-                </a:lnTo>
-                <a:lnTo>
-                  <a:pt x="1083809" y="1083809"/>
-                </a:lnTo>
-                <a:lnTo>
-                  <a:pt x="0" y="1083809"/>
-                </a:lnTo>
-                <a:lnTo>
-                  <a:pt x="0" y="0"/>
-                </a:lnTo>
-                <a:close/>
-              </a:path>
-            </a:pathLst>
-          </a:custGeom>
-          <a:blipFill>
-            <a:blip r:embed="rId4">
-              <a:extLst>
-                <a:ext uri="{96DAC541-7B7A-43D3-8B79-37D633B846F1}">
-                  <asvg:svgBlip xmlns:asvg="http://schemas.microsoft.com/office/drawing/2016/SVG/main" r:embed="rId5"/>
-                </a:ext>
-              </a:extLst>
-            </a:blip>
-            <a:stretch>
-              <a:fillRect/>
-            </a:stretch>
-          </a:blipFill>
-        </p:spPr>
-        <p:txBody>
-          <a:bodyPr/>
-          <a:lstStyle/>
-          <a:p>
-            <a:endParaRPr lang="en-US"/>
-          </a:p>
-        </p:txBody>
-      </p:sp>
-      <p:sp>
-        <p:nvSpPr>
-          <p:cNvPr id="15" name="Freeform 15"/>
-          <p:cNvSpPr/>
-          <p:nvPr/>
-        </p:nvSpPr>
-        <p:spPr>
-          <a:xfrm rot="-5400000">
-            <a:off x="17266571" y="9258300"/>
-            <a:ext cx="1083809" cy="1083809"/>
-          </a:xfrm>
-          <a:custGeom>
-            <a:avLst/>
-            <a:gdLst/>
-            <a:ahLst/>
-            <a:cxnLst/>
-            <a:rect l="l" t="t" r="r" b="b"/>
-            <a:pathLst>
-              <a:path w="1083809" h="1083809">
-                <a:moveTo>
-                  <a:pt x="0" y="0"/>
-                </a:moveTo>
-                <a:lnTo>
-                  <a:pt x="1083809" y="0"/>
-                </a:lnTo>
-                <a:lnTo>
-                  <a:pt x="1083809" y="1083809"/>
-                </a:lnTo>
-                <a:lnTo>
-                  <a:pt x="0" y="1083809"/>
-                </a:lnTo>
-                <a:lnTo>
-                  <a:pt x="0" y="0"/>
-                </a:lnTo>
-                <a:close/>
-              </a:path>
-            </a:pathLst>
-          </a:custGeom>
-          <a:blipFill>
-            <a:blip r:embed="rId6">
-              <a:extLst>
-                <a:ext uri="{96DAC541-7B7A-43D3-8B79-37D633B846F1}">
-                  <asvg:svgBlip xmlns:asvg="http://schemas.microsoft.com/office/drawing/2016/SVG/main" r:embed="rId7"/>
-                </a:ext>
-              </a:extLst>
-            </a:blip>
-            <a:stretch>
-              <a:fillRect/>
-            </a:stretch>
-          </a:blipFill>
-        </p:spPr>
-        <p:txBody>
-          <a:bodyPr/>
-          <a:lstStyle/>
-          <a:p>
-            <a:endParaRPr lang="en-US"/>
-          </a:p>
-        </p:txBody>
-      </p:sp>
-      <p:sp>
-        <p:nvSpPr>
-          <p:cNvPr id="17" name="TextBox 16">
+          <p:cNvPr id="18" name="TextBox 17">
             <a:extLst>
               <a:ext uri="{FF2B5EF4-FFF2-40B4-BE49-F238E27FC236}">
-                <a16:creationId xmlns:a16="http://schemas.microsoft.com/office/drawing/2014/main" id="{91A04AFF-295D-653B-F024-885D11781A87}"/>
+                <a16:creationId xmlns:a16="http://schemas.microsoft.com/office/drawing/2014/main" id="{C5445EBB-E248-6A79-DD8D-CF4FFE48BF5B}"/>
               </a:ext>
             </a:extLst>
           </p:cNvPr>
@@ -17348,11 +17354,11 @@
       </p:sp>
       <p:sp>
         <p:nvSpPr>
-          <p:cNvPr id="21" name="TextBox 20">
+          <p:cNvPr id="19" name="TextBox 18">
             <a:hlinkClick r:id="rId8"/>
             <a:extLst>
               <a:ext uri="{FF2B5EF4-FFF2-40B4-BE49-F238E27FC236}">
-                <a16:creationId xmlns:a16="http://schemas.microsoft.com/office/drawing/2014/main" id="{39087E63-B576-2025-7871-D69C0362A137}"/>
+                <a16:creationId xmlns:a16="http://schemas.microsoft.com/office/drawing/2014/main" id="{3A969E91-357D-7940-9DE8-E38F22DA39B6}"/>
               </a:ext>
             </a:extLst>
           </p:cNvPr>
@@ -17362,7 +17368,7 @@
         <p:spPr>
           <a:xfrm>
             <a:off x="3768213" y="4203073"/>
-            <a:ext cx="4613787" cy="584775"/>
+            <a:ext cx="5147187" cy="584775"/>
           </a:xfrm>
           <a:prstGeom prst="rect">
             <a:avLst/>
@@ -17381,7 +17387,7 @@
                 <a:sym typeface="Kollektif Bold"/>
                 <a:hlinkClick r:id="rId8"/>
               </a:rPr>
-              <a:t>Click on me (ctrl + click)</a:t>
+              <a:t>Click on me -&gt; (ctrl + click)</a:t>
             </a:r>
             <a:endParaRPr lang="en-US" sz="3200" dirty="0"/>
           </a:p>
@@ -17389,10 +17395,10 @@
       </p:sp>
       <p:pic>
         <p:nvPicPr>
-          <p:cNvPr id="23" name="Graphic 22" descr="Link with solid fill">
+          <p:cNvPr id="20" name="Graphic 19" descr="Link with solid fill">
             <a:extLst>
               <a:ext uri="{FF2B5EF4-FFF2-40B4-BE49-F238E27FC236}">
-                <a16:creationId xmlns:a16="http://schemas.microsoft.com/office/drawing/2014/main" id="{A737A4A2-BD56-3D38-92B2-B13D659A9775}"/>
+                <a16:creationId xmlns:a16="http://schemas.microsoft.com/office/drawing/2014/main" id="{A7D3EC60-685E-FD1F-7FF4-22230205956A}"/>
               </a:ext>
             </a:extLst>
           </p:cNvPr>
@@ -18115,13 +18121,15 @@
               </a:ext>
             </a:extLst>
           </p:cNvPr>
-          <p:cNvSpPr txBox="1"/>
+          <p:cNvSpPr txBox="1">
+            <a:spLocks/>
+          </p:cNvSpPr>
           <p:nvPr/>
         </p:nvSpPr>
         <p:spPr>
           <a:xfrm>
             <a:off x="3768213" y="4203073"/>
-            <a:ext cx="4613787" cy="584775"/>
+            <a:ext cx="5375787" cy="584775"/>
           </a:xfrm>
           <a:prstGeom prst="rect">
             <a:avLst/>
@@ -18140,7 +18148,7 @@
                 <a:sym typeface="Kollektif Bold"/>
                 <a:hlinkClick r:id="rId9"/>
               </a:rPr>
-              <a:t>Click on me (ctrl + click)</a:t>
+              <a:t>Click on me -&gt; (ctrl + click)</a:t>
             </a:r>
             <a:endParaRPr lang="en-US" sz="3200" dirty="0"/>
           </a:p>
@@ -18880,7 +18888,7 @@
         <p:spPr>
           <a:xfrm>
             <a:off x="3768213" y="4203073"/>
-            <a:ext cx="4613787" cy="584775"/>
+            <a:ext cx="5375787" cy="584775"/>
           </a:xfrm>
           <a:prstGeom prst="rect">
             <a:avLst/>
@@ -18899,7 +18907,7 @@
                 <a:sym typeface="Kollektif Bold"/>
                 <a:hlinkClick r:id="rId9"/>
               </a:rPr>
-              <a:t>Click on me (ctrl + click)</a:t>
+              <a:t>Click on me -&gt; (ctrl + click)</a:t>
             </a:r>
             <a:endParaRPr lang="en-US" sz="3200" dirty="0"/>
           </a:p>
@@ -19639,7 +19647,7 @@
         <p:spPr>
           <a:xfrm>
             <a:off x="3768213" y="4203073"/>
-            <a:ext cx="4613787" cy="584775"/>
+            <a:ext cx="5223387" cy="584775"/>
           </a:xfrm>
           <a:prstGeom prst="rect">
             <a:avLst/>
@@ -19658,7 +19666,7 @@
                 <a:sym typeface="Kollektif Bold"/>
                 <a:hlinkClick r:id="rId9"/>
               </a:rPr>
-              <a:t>Click on me (ctrl + click)</a:t>
+              <a:t>Click on me -&gt; (ctrl + click)</a:t>
             </a:r>
             <a:endParaRPr lang="en-US" sz="3200" dirty="0"/>
           </a:p>
@@ -20398,7 +20406,7 @@
         <p:spPr>
           <a:xfrm>
             <a:off x="3768213" y="4177725"/>
-            <a:ext cx="4613787" cy="584775"/>
+            <a:ext cx="5147187" cy="584775"/>
           </a:xfrm>
           <a:prstGeom prst="rect">
             <a:avLst/>
@@ -20417,7 +20425,7 @@
                 <a:sym typeface="Kollektif Bold"/>
                 <a:hlinkClick r:id="rId9"/>
               </a:rPr>
-              <a:t>Click on me (ctrl + click)</a:t>
+              <a:t>Click on me -&gt; (ctrl + click)</a:t>
             </a:r>
             <a:endParaRPr lang="en-US" sz="3200" dirty="0"/>
           </a:p>
@@ -21157,7 +21165,7 @@
         <p:spPr>
           <a:xfrm>
             <a:off x="3768213" y="4177725"/>
-            <a:ext cx="4613787" cy="584775"/>
+            <a:ext cx="5375787" cy="584775"/>
           </a:xfrm>
           <a:prstGeom prst="rect">
             <a:avLst/>
@@ -21176,7 +21184,7 @@
                 <a:sym typeface="Kollektif Bold"/>
                 <a:hlinkClick r:id="rId9"/>
               </a:rPr>
-              <a:t>Click on me (ctrl + click)</a:t>
+              <a:t>Click on me -&gt; (ctrl + click)</a:t>
             </a:r>
             <a:endParaRPr lang="en-US" sz="3200" dirty="0"/>
           </a:p>
